--- a/RedTeamLoop.pptx
+++ b/RedTeamLoop.pptx
@@ -13822,6 +13822,154 @@
             </a:solidFill>
             <a:prstDash val="solid"/>
             <a:tailEnd type="none"/>
+          </a:ln>
+        </p:spPr>
+        <p:txBody>
+          <a:bodyPr/>
+          <a:lstStyle/>
+          <a:p>
+            <a:endParaRPr lang="en-US"/>
+          </a:p>
+        </p:txBody>
+      </p:sp>
+      <p:sp>
+        <p:nvSpPr>
+          <p:cNvPr id="9" name="Shape 9">
+            <a:extLst>
+              <a:ext uri="{FF2B5EF4-FFF2-40B4-BE49-F238E27FC236}">
+                <a16:creationId xmlns:a16="http://schemas.microsoft.com/office/drawing/2014/main" id="{064E92B2-5C49-149D-5423-3B989A57159B}"/>
+              </a:ext>
+            </a:extLst>
+          </p:cNvPr>
+          <p:cNvSpPr/>
+          <p:nvPr/>
+        </p:nvSpPr>
+        <p:spPr>
+          <a:xfrm flipH="1">
+            <a:off x="5349239" y="4727065"/>
+            <a:ext cx="1792805" cy="36645"/>
+          </a:xfrm>
+          <a:prstGeom prst="line">
+            <a:avLst/>
+          </a:prstGeom>
+          <a:noFill/>
+          <a:ln w="19050">
+            <a:solidFill>
+              <a:srgbClr val="94A3B8"/>
+            </a:solidFill>
+            <a:prstDash val="solid"/>
+            <a:tailEnd type="none"/>
+          </a:ln>
+        </p:spPr>
+        <p:txBody>
+          <a:bodyPr/>
+          <a:lstStyle/>
+          <a:p>
+            <a:endParaRPr lang="en-US"/>
+          </a:p>
+        </p:txBody>
+      </p:sp>
+      <p:sp>
+        <p:nvSpPr>
+          <p:cNvPr id="14" name="Shape 9">
+            <a:extLst>
+              <a:ext uri="{FF2B5EF4-FFF2-40B4-BE49-F238E27FC236}">
+                <a16:creationId xmlns:a16="http://schemas.microsoft.com/office/drawing/2014/main" id="{E07B9D95-1547-A61C-81FA-FBF0876F70C5}"/>
+              </a:ext>
+            </a:extLst>
+          </p:cNvPr>
+          <p:cNvSpPr/>
+          <p:nvPr/>
+        </p:nvSpPr>
+        <p:spPr>
+          <a:xfrm>
+            <a:off x="7142045" y="4238052"/>
+            <a:ext cx="0" cy="489014"/>
+          </a:xfrm>
+          <a:prstGeom prst="line">
+            <a:avLst/>
+          </a:prstGeom>
+          <a:noFill/>
+          <a:ln w="19050">
+            <a:solidFill>
+              <a:srgbClr val="94A3B8"/>
+            </a:solidFill>
+            <a:prstDash val="solid"/>
+            <a:tailEnd type="oval"/>
+          </a:ln>
+        </p:spPr>
+        <p:txBody>
+          <a:bodyPr/>
+          <a:lstStyle/>
+          <a:p>
+            <a:endParaRPr lang="en-US"/>
+          </a:p>
+        </p:txBody>
+      </p:sp>
+      <p:sp>
+        <p:nvSpPr>
+          <p:cNvPr id="17" name="Shape 9">
+            <a:extLst>
+              <a:ext uri="{FF2B5EF4-FFF2-40B4-BE49-F238E27FC236}">
+                <a16:creationId xmlns:a16="http://schemas.microsoft.com/office/drawing/2014/main" id="{97BFA8C2-5D2F-DE7A-B814-6FAF568D4B7E}"/>
+              </a:ext>
+            </a:extLst>
+          </p:cNvPr>
+          <p:cNvSpPr/>
+          <p:nvPr/>
+        </p:nvSpPr>
+        <p:spPr>
+          <a:xfrm>
+            <a:off x="5337522" y="4162719"/>
+            <a:ext cx="16" cy="619452"/>
+          </a:xfrm>
+          <a:prstGeom prst="line">
+            <a:avLst/>
+          </a:prstGeom>
+          <a:noFill/>
+          <a:ln w="19050">
+            <a:solidFill>
+              <a:srgbClr val="94A3B8"/>
+            </a:solidFill>
+            <a:prstDash val="solid"/>
+            <a:tailEnd type="none"/>
+          </a:ln>
+        </p:spPr>
+        <p:txBody>
+          <a:bodyPr/>
+          <a:lstStyle/>
+          <a:p>
+            <a:endParaRPr lang="en-US" dirty="0"/>
+          </a:p>
+        </p:txBody>
+      </p:sp>
+      <p:sp>
+        <p:nvSpPr>
+          <p:cNvPr id="20" name="Shape 9">
+            <a:extLst>
+              <a:ext uri="{FF2B5EF4-FFF2-40B4-BE49-F238E27FC236}">
+                <a16:creationId xmlns:a16="http://schemas.microsoft.com/office/drawing/2014/main" id="{CA58DFAE-7E88-B689-6362-15A7C370B758}"/>
+              </a:ext>
+            </a:extLst>
+          </p:cNvPr>
+          <p:cNvSpPr/>
+          <p:nvPr/>
+        </p:nvSpPr>
+        <p:spPr>
+          <a:xfrm flipH="1" flipV="1">
+            <a:off x="4661070" y="4162718"/>
+            <a:ext cx="676452" cy="21355"/>
+          </a:xfrm>
+          <a:prstGeom prst="line">
+            <a:avLst/>
+          </a:prstGeom>
+          <a:noFill/>
+          <a:ln w="19050">
+            <a:solidFill>
+              <a:srgbClr val="94A3B8"/>
+            </a:solidFill>
+            <a:prstDash val="solid"/>
+            <a:tailEnd type="triangle"/>
           </a:ln>
         </p:spPr>
         <p:txBody>
